--- a/data-eng/decks/w3d3s0.pptx
+++ b/data-eng/decks/w3d3s0.pptx
@@ -5738,7 +5738,7 @@
                 <a:ea typeface="Pretendard"/>
                 <a:cs typeface="Pretendard"/>
               </a:rPr>
-              <a:t>1 3-2 의 파일</a:t>
+              <a:t>1. 3-2 의 파일</a:t>
             </a:r>
           </a:p>
         </p:txBody>
@@ -5884,7 +5884,7 @@
                 <a:ea typeface="Pretendard"/>
                 <a:cs typeface="Pretendard"/>
               </a:rPr>
-              <a:t>2 duckdb·디스크</a:t>
+              <a:t>2. duckdb·디스크</a:t>
             </a:r>
           </a:p>
         </p:txBody>
@@ -6030,7 +6030,7 @@
                 <a:ea typeface="Pretendard"/>
                 <a:cs typeface="Pretendard"/>
               </a:rPr>
-              <a:t>3 오늘 만들 것</a:t>
+              <a:t>3. 오늘 만들 것</a:t>
             </a:r>
           </a:p>
         </p:txBody>
@@ -6176,7 +6176,7 @@
                 <a:ea typeface="Pretendard"/>
                 <a:cs typeface="Pretendard"/>
               </a:rPr>
-              <a:t>4 재설정</a:t>
+              <a:t>4. 재설정</a:t>
             </a:r>
           </a:p>
         </p:txBody>
